--- a/v2/tests/unit/export/golden/report-en.pptx
+++ b/v2/tests/unit/export/golden/report-en.pptx
@@ -2019,9 +2019,6 @@
               </a:rPr>
               <a:t>606,500</a:t>
             </a:r>
-            <a:pPr algn="l" indent="0" marL="0">
-              <a:buNone/>
-            </a:pPr>
             <a:r>
               <a:rPr lang="en-GB" altLang="en-US" sz="1000" dirty="0">
                 <a:solidFill>

--- a/v2/tests/unit/export/golden/report-en.pptx
+++ b/v2/tests/unit/export/golden/report-en.pptx
@@ -2017,7 +2017,7 @@
                 <a:ea typeface="Readex Pro" pitchFamily="34" charset="-122"/>
                 <a:cs typeface="Readex Pro" pitchFamily="34" charset="-120"/>
               </a:rPr>
-              <a:t>606,500</a:t>
+              <a:t>48,300</a:t>
             </a:r>
             <a:r>
               <a:rPr lang="en-GB" altLang="en-US" sz="1000" dirty="0">
@@ -2067,7 +2067,7 @@
                 <a:ea typeface="IBM Plex Sans Arabic" pitchFamily="34" charset="-122"/>
                 <a:cs typeface="IBM Plex Sans Arabic" pitchFamily="34" charset="-120"/>
               </a:rPr>
-              <a:t>vs 512,000 SAR</a:t>
+              <a:t>vs 40,250 SAR</a:t>
             </a:r>
             <a:endParaRPr lang="en-GB" sz="950" dirty="0"/>
           </a:p>
@@ -2110,7 +2110,7 @@
                 <a:ea typeface="IBM Plex Sans Arabic" pitchFamily="34" charset="-122"/>
                 <a:cs typeface="IBM Plex Sans Arabic" pitchFamily="34" charset="-120"/>
               </a:rPr>
-              <a:t>+18.5%</a:t>
+              <a:t>+20%</a:t>
             </a:r>
             <a:endParaRPr lang="en-GB" sz="900" dirty="0"/>
           </a:p>
@@ -2215,7 +2215,7 @@
                 <a:ea typeface="Readex Pro" pitchFamily="34" charset="-122"/>
                 <a:cs typeface="Readex Pro" pitchFamily="34" charset="-120"/>
               </a:rPr>
-              <a:t>4</a:t>
+              <a:t>3</a:t>
             </a:r>
             <a:endParaRPr lang="en-GB" sz="2600" dirty="0"/>
           </a:p>
@@ -2254,7 +2254,7 @@
                 <a:ea typeface="IBM Plex Sans Arabic" pitchFamily="34" charset="-122"/>
                 <a:cs typeface="IBM Plex Sans Arabic" pitchFamily="34" charset="-120"/>
               </a:rPr>
-              <a:t>vs 2</a:t>
+              <a:t>vs 1</a:t>
             </a:r>
             <a:endParaRPr lang="en-GB" sz="950" dirty="0"/>
           </a:p>
@@ -2297,7 +2297,7 @@
                 <a:ea typeface="IBM Plex Sans Arabic" pitchFamily="34" charset="-122"/>
                 <a:cs typeface="IBM Plex Sans Arabic" pitchFamily="34" charset="-120"/>
               </a:rPr>
-              <a:t>+100%</a:t>
+              <a:t>+200%</a:t>
             </a:r>
             <a:endParaRPr lang="en-GB" sz="900" dirty="0"/>
           </a:p>
@@ -2363,7 +2363,7 @@
                 <a:ea typeface="IBM Plex Sans Arabic" pitchFamily="34" charset="-122"/>
                 <a:cs typeface="IBM Plex Sans Arabic" pitchFamily="34" charset="-120"/>
               </a:rPr>
-              <a:t>Contracts improved</a:t>
+              <a:t>Partner visits</a:t>
             </a:r>
             <a:endParaRPr lang="en-GB" sz="1050" dirty="0"/>
           </a:p>
@@ -2402,7 +2402,7 @@
                 <a:ea typeface="Readex Pro" pitchFamily="34" charset="-122"/>
                 <a:cs typeface="Readex Pro" pitchFamily="34" charset="-120"/>
               </a:rPr>
-              <a:t>3</a:t>
+              <a:t>9</a:t>
             </a:r>
             <a:endParaRPr lang="en-GB" sz="2600" dirty="0"/>
           </a:p>
@@ -2441,7 +2441,7 @@
                 <a:ea typeface="IBM Plex Sans Arabic" pitchFamily="34" charset="-122"/>
                 <a:cs typeface="IBM Plex Sans Arabic" pitchFamily="34" charset="-120"/>
               </a:rPr>
-              <a:t>vs 1</a:t>
+              <a:t>vs 6</a:t>
             </a:r>
             <a:endParaRPr lang="en-GB" sz="950" dirty="0"/>
           </a:p>
@@ -2484,7 +2484,7 @@
                 <a:ea typeface="IBM Plex Sans Arabic" pitchFamily="34" charset="-122"/>
                 <a:cs typeface="IBM Plex Sans Arabic" pitchFamily="34" charset="-120"/>
               </a:rPr>
-              <a:t>+200%</a:t>
+              <a:t>+50%</a:t>
             </a:r>
             <a:endParaRPr lang="en-GB" sz="900" dirty="0"/>
           </a:p>
@@ -2550,7 +2550,7 @@
                 <a:ea typeface="IBM Plex Sans Arabic" pitchFamily="34" charset="-122"/>
                 <a:cs typeface="IBM Plex Sans Arabic" pitchFamily="34" charset="-120"/>
               </a:rPr>
-              <a:t>Hotel and airline suppliers</a:t>
+              <a:t>Proposals sent</a:t>
             </a:r>
             <a:endParaRPr lang="en-GB" sz="1050" dirty="0"/>
           </a:p>
@@ -2589,7 +2589,7 @@
                 <a:ea typeface="Readex Pro" pitchFamily="34" charset="-122"/>
                 <a:cs typeface="Readex Pro" pitchFamily="34" charset="-120"/>
               </a:rPr>
-              <a:t>30</a:t>
+              <a:t>14</a:t>
             </a:r>
             <a:endParaRPr lang="en-GB" sz="2600" dirty="0"/>
           </a:p>
@@ -2628,7 +2628,7 @@
                 <a:ea typeface="IBM Plex Sans Arabic" pitchFamily="34" charset="-122"/>
                 <a:cs typeface="IBM Plex Sans Arabic" pitchFamily="34" charset="-120"/>
               </a:rPr>
-              <a:t>vs 19</a:t>
+              <a:t>vs 11</a:t>
             </a:r>
             <a:endParaRPr lang="en-GB" sz="950" dirty="0"/>
           </a:p>
@@ -2671,7 +2671,7 @@
                 <a:ea typeface="IBM Plex Sans Arabic" pitchFamily="34" charset="-122"/>
                 <a:cs typeface="IBM Plex Sans Arabic" pitchFamily="34" charset="-120"/>
               </a:rPr>
-              <a:t>+57.9%</a:t>
+              <a:t>+27.3%</a:t>
             </a:r>
             <a:endParaRPr lang="en-GB" sz="900" dirty="0"/>
           </a:p>
@@ -2737,7 +2737,7 @@
                 <a:ea typeface="IBM Plex Sans Arabic" pitchFamily="34" charset="-122"/>
                 <a:cs typeface="IBM Plex Sans Arabic" pitchFamily="34" charset="-120"/>
               </a:rPr>
-              <a:t>Airlines</a:t>
+              <a:t>Partner contacts added</a:t>
             </a:r>
             <a:endParaRPr lang="en-GB" sz="1050" dirty="0"/>
           </a:p>
@@ -2776,7 +2776,7 @@
                 <a:ea typeface="Readex Pro" pitchFamily="34" charset="-122"/>
                 <a:cs typeface="Readex Pro" pitchFamily="34" charset="-120"/>
               </a:rPr>
-              <a:t>82</a:t>
+              <a:t>137</a:t>
             </a:r>
             <a:endParaRPr lang="en-GB" sz="2600" dirty="0"/>
           </a:p>
@@ -2815,7 +2815,7 @@
                 <a:ea typeface="IBM Plex Sans Arabic" pitchFamily="34" charset="-122"/>
                 <a:cs typeface="IBM Plex Sans Arabic" pitchFamily="34" charset="-120"/>
               </a:rPr>
-              <a:t>vs 79</a:t>
+              <a:t>vs 120</a:t>
             </a:r>
             <a:endParaRPr lang="en-GB" sz="950" dirty="0"/>
           </a:p>
@@ -2858,7 +2858,7 @@
                 <a:ea typeface="IBM Plex Sans Arabic" pitchFamily="34" charset="-122"/>
                 <a:cs typeface="IBM Plex Sans Arabic" pitchFamily="34" charset="-120"/>
               </a:rPr>
-              <a:t>+3.8%</a:t>
+              <a:t>+14.2%</a:t>
             </a:r>
             <a:endParaRPr lang="en-GB" sz="900" dirty="0"/>
           </a:p>
@@ -2924,7 +2924,7 @@
                 <a:ea typeface="IBM Plex Sans Arabic" pitchFamily="34" charset="-122"/>
                 <a:cs typeface="IBM Plex Sans Arabic" pitchFamily="34" charset="-120"/>
               </a:rPr>
-              <a:t>Payment methods</a:t>
+              <a:t>Cities covered</a:t>
             </a:r>
             <a:endParaRPr lang="en-GB" sz="1050" dirty="0"/>
           </a:p>
@@ -2963,7 +2963,7 @@
                 <a:ea typeface="Readex Pro" pitchFamily="34" charset="-122"/>
                 <a:cs typeface="Readex Pro" pitchFamily="34" charset="-120"/>
               </a:rPr>
-              <a:t>6</a:t>
+              <a:t>7</a:t>
             </a:r>
             <a:endParaRPr lang="en-GB" sz="2600" dirty="0"/>
           </a:p>
@@ -3002,7 +3002,7 @@
                 <a:ea typeface="IBM Plex Sans Arabic" pitchFamily="34" charset="-122"/>
                 <a:cs typeface="IBM Plex Sans Arabic" pitchFamily="34" charset="-120"/>
               </a:rPr>
-              <a:t>vs 4</a:t>
+              <a:t>vs 5</a:t>
             </a:r>
             <a:endParaRPr lang="en-GB" sz="950" dirty="0"/>
           </a:p>
@@ -3045,7 +3045,7 @@
                 <a:ea typeface="IBM Plex Sans Arabic" pitchFamily="34" charset="-122"/>
                 <a:cs typeface="IBM Plex Sans Arabic" pitchFamily="34" charset="-120"/>
               </a:rPr>
-              <a:t>+50%</a:t>
+              <a:t>+40%</a:t>
             </a:r>
             <a:endParaRPr lang="en-GB" sz="900" dirty="0"/>
           </a:p>
@@ -3111,7 +3111,7 @@
                 <a:ea typeface="IBM Plex Sans Arabic" pitchFamily="34" charset="-122"/>
                 <a:cs typeface="IBM Plex Sans Arabic" pitchFamily="34" charset="-120"/>
               </a:rPr>
-              <a:t>Countries with car and driver</a:t>
+              <a:t>Workshops held</a:t>
             </a:r>
             <a:endParaRPr lang="en-GB" sz="1050" dirty="0"/>
           </a:p>
@@ -3150,7 +3150,7 @@
                 <a:ea typeface="Readex Pro" pitchFamily="34" charset="-122"/>
                 <a:cs typeface="Readex Pro" pitchFamily="34" charset="-120"/>
               </a:rPr>
-              <a:t>36</a:t>
+              <a:t>5</a:t>
             </a:r>
             <a:endParaRPr lang="en-GB" sz="2600" dirty="0"/>
           </a:p>
@@ -3189,7 +3189,7 @@
                 <a:ea typeface="IBM Plex Sans Arabic" pitchFamily="34" charset="-122"/>
                 <a:cs typeface="IBM Plex Sans Arabic" pitchFamily="34" charset="-120"/>
               </a:rPr>
-              <a:t>vs 12</a:t>
+              <a:t>vs 4</a:t>
             </a:r>
             <a:endParaRPr lang="en-GB" sz="950" dirty="0"/>
           </a:p>
@@ -3232,7 +3232,7 @@
                 <a:ea typeface="IBM Plex Sans Arabic" pitchFamily="34" charset="-122"/>
                 <a:cs typeface="IBM Plex Sans Arabic" pitchFamily="34" charset="-120"/>
               </a:rPr>
-              <a:t>+200%</a:t>
+              <a:t>+25%</a:t>
             </a:r>
             <a:endParaRPr lang="en-GB" sz="900" dirty="0"/>
           </a:p>
@@ -3298,7 +3298,7 @@
                 <a:ea typeface="IBM Plex Sans Arabic" pitchFamily="34" charset="-122"/>
                 <a:cs typeface="IBM Plex Sans Arabic" pitchFamily="34" charset="-120"/>
               </a:rPr>
-              <a:t>Payments on time</a:t>
+              <a:t>Replies on time</a:t>
             </a:r>
             <a:endParaRPr lang="en-GB" sz="1050" dirty="0"/>
           </a:p>
@@ -3337,7 +3337,7 @@
                 <a:ea typeface="Readex Pro" pitchFamily="34" charset="-122"/>
                 <a:cs typeface="Readex Pro" pitchFamily="34" charset="-120"/>
               </a:rPr>
-              <a:t>87.5%</a:t>
+              <a:t>92.5%</a:t>
             </a:r>
             <a:endParaRPr lang="en-GB" sz="2600" dirty="0"/>
           </a:p>
@@ -3376,7 +3376,7 @@
                 <a:ea typeface="IBM Plex Sans Arabic" pitchFamily="34" charset="-122"/>
                 <a:cs typeface="IBM Plex Sans Arabic" pitchFamily="34" charset="-120"/>
               </a:rPr>
-              <a:t>vs 91%</a:t>
+              <a:t>vs 90%</a:t>
             </a:r>
             <a:endParaRPr lang="en-GB" sz="950" dirty="0"/>
           </a:p>
@@ -3399,7 +3399,7 @@
             </a:avLst>
           </a:prstGeom>
           <a:solidFill>
-            <a:srgbClr val="FBE4E8"/>
+            <a:srgbClr val="E2F2EA"/>
           </a:solidFill>
           <a:ln/>
         </p:spPr>
@@ -3413,13 +3413,13 @@
             <a:r>
               <a:rPr lang="en-GB" altLang="en-US" sz="900" b="1" dirty="0">
                 <a:solidFill>
-                  <a:srgbClr val="C0233F"/>
+                  <a:srgbClr val="1F7A4D"/>
                 </a:solidFill>
                 <a:latin typeface="IBM Plex Sans Arabic" pitchFamily="34" charset="0"/>
                 <a:ea typeface="IBM Plex Sans Arabic" pitchFamily="34" charset="-122"/>
                 <a:cs typeface="IBM Plex Sans Arabic" pitchFamily="34" charset="-120"/>
               </a:rPr>
-              <a:t>−3.8%</a:t>
+              <a:t>+2.5 pts</a:t>
             </a:r>
             <a:endParaRPr lang="en-GB" sz="900" dirty="0"/>
           </a:p>
@@ -3524,7 +3524,7 @@
                 <a:ea typeface="Readex Pro" pitchFamily="34" charset="-122"/>
                 <a:cs typeface="Readex Pro" pitchFamily="34" charset="-120"/>
               </a:rPr>
-              <a:t>7</a:t>
+              <a:t>4</a:t>
             </a:r>
             <a:endParaRPr lang="en-GB" sz="2600" dirty="0"/>
           </a:p>
@@ -3563,7 +3563,7 @@
                 <a:ea typeface="IBM Plex Sans Arabic" pitchFamily="34" charset="-122"/>
                 <a:cs typeface="IBM Plex Sans Arabic" pitchFamily="34" charset="-120"/>
               </a:rPr>
-              <a:t>vs 12</a:t>
+              <a:t>vs 6</a:t>
             </a:r>
             <a:endParaRPr lang="en-GB" sz="950" dirty="0"/>
           </a:p>
@@ -3606,7 +3606,7 @@
                 <a:ea typeface="IBM Plex Sans Arabic" pitchFamily="34" charset="-122"/>
                 <a:cs typeface="IBM Plex Sans Arabic" pitchFamily="34" charset="-120"/>
               </a:rPr>
-              <a:t>−41.7%</a:t>
+              <a:t>−33.3%</a:t>
             </a:r>
             <a:endParaRPr lang="en-GB" sz="900" dirty="0"/>
           </a:p>
@@ -3711,7 +3711,7 @@
                 <a:ea typeface="Readex Pro" pitchFamily="34" charset="-122"/>
                 <a:cs typeface="Readex Pro" pitchFamily="34" charset="-120"/>
               </a:rPr>
-              <a:t>2</a:t>
+              <a:t>1</a:t>
             </a:r>
             <a:endParaRPr lang="en-GB" sz="2600" dirty="0"/>
           </a:p>
@@ -4575,7 +4575,7 @@
                           <a:ea typeface="IBM Plex Mono" pitchFamily="34" charset="-122"/>
                           <a:cs typeface="IBM Plex Mono" pitchFamily="34" charset="-120"/>
                         </a:rPr>
-                        <a:t>100,000</a:t>
+                        <a:t>90,000</a:t>
                       </a:r>
                       <a:endParaRPr lang="en-GB" sz="1050" dirty="0">
                         <a:latin typeface="IBM Plex Mono" charset="0"/>
@@ -4640,7 +4640,7 @@
                           <a:ea typeface="IBM Plex Mono" pitchFamily="34" charset="-122"/>
                           <a:cs typeface="IBM Plex Mono" pitchFamily="34" charset="-120"/>
                         </a:rPr>
-                        <a:t>11,500</a:t>
+                        <a:t>7,250</a:t>
                       </a:r>
                       <a:endParaRPr lang="en-GB" sz="1050" dirty="0">
                         <a:latin typeface="IBM Plex Mono" charset="0"/>
@@ -4705,7 +4705,7 @@
                           <a:ea typeface="IBM Plex Mono" pitchFamily="34" charset="-122"/>
                           <a:cs typeface="IBM Plex Mono" pitchFamily="34" charset="-120"/>
                         </a:rPr>
-                        <a:t>11,500</a:t>
+                        <a:t>7,250</a:t>
                       </a:r>
                       <a:endParaRPr lang="en-GB" sz="1050" dirty="0">
                         <a:latin typeface="IBM Plex Mono" charset="0"/>
@@ -4967,7 +4967,7 @@
                           <a:ea typeface="IBM Plex Mono" pitchFamily="34" charset="-122"/>
                           <a:cs typeface="IBM Plex Mono" pitchFamily="34" charset="-120"/>
                         </a:rPr>
-                        <a:t>3</a:t>
+                        <a:t>4</a:t>
                       </a:r>
                       <a:endParaRPr lang="en-GB" sz="1050" dirty="0">
                         <a:latin typeface="IBM Plex Mono" charset="0"/>
@@ -5097,7 +5097,7 @@
                           <a:ea typeface="IBM Plex Mono" pitchFamily="34" charset="-122"/>
                           <a:cs typeface="IBM Plex Mono" pitchFamily="34" charset="-120"/>
                         </a:rPr>
-                        <a:t>1</a:t>
+                        <a:t>2</a:t>
                       </a:r>
                       <a:endParaRPr lang="en-GB" sz="1050" dirty="0">
                         <a:latin typeface="IBM Plex Mono" charset="0"/>
@@ -5359,7 +5359,7 @@
                           <a:ea typeface="IBM Plex Mono" pitchFamily="34" charset="-122"/>
                           <a:cs typeface="IBM Plex Mono" pitchFamily="34" charset="-120"/>
                         </a:rPr>
-                        <a:t>2</a:t>
+                        <a:t>3</a:t>
                       </a:r>
                       <a:endParaRPr lang="en-GB" sz="1050" dirty="0">
                         <a:latin typeface="IBM Plex Mono" charset="0"/>
@@ -5489,7 +5489,7 @@
                           <a:ea typeface="IBM Plex Mono" pitchFamily="34" charset="-122"/>
                           <a:cs typeface="IBM Plex Mono" pitchFamily="34" charset="-120"/>
                         </a:rPr>
-                        <a:t>2</a:t>
+                        <a:t>1</a:t>
                       </a:r>
                       <a:endParaRPr lang="en-GB" sz="1050" dirty="0">
                         <a:latin typeface="IBM Plex Mono" charset="0"/>
@@ -5751,7 +5751,7 @@
                           <a:ea typeface="IBM Plex Mono" pitchFamily="34" charset="-122"/>
                           <a:cs typeface="IBM Plex Mono" pitchFamily="34" charset="-120"/>
                         </a:rPr>
-                        <a:t>500,000</a:t>
+                        <a:t>300,000</a:t>
                       </a:r>
                       <a:endParaRPr lang="en-GB" sz="1050" dirty="0">
                         <a:latin typeface="IBM Plex Mono" charset="0"/>
@@ -5881,7 +5881,7 @@
                           <a:ea typeface="IBM Plex Mono" pitchFamily="34" charset="-122"/>
                           <a:cs typeface="IBM Plex Mono" pitchFamily="34" charset="-120"/>
                         </a:rPr>
-                        <a:t>250,000</a:t>
+                        <a:t>120,000</a:t>
                       </a:r>
                       <a:endParaRPr lang="en-GB" sz="1050" dirty="0">
                         <a:latin typeface="IBM Plex Mono" charset="0"/>
@@ -6143,7 +6143,7 @@
                           <a:ea typeface="IBM Plex Mono" pitchFamily="34" charset="-122"/>
                           <a:cs typeface="IBM Plex Mono" pitchFamily="34" charset="-120"/>
                         </a:rPr>
-                        <a:t>6</a:t>
+                        <a:t>5</a:t>
                       </a:r>
                       <a:endParaRPr lang="en-GB" sz="1050" dirty="0">
                         <a:latin typeface="IBM Plex Mono" charset="0"/>
@@ -6208,7 +6208,7 @@
                           <a:ea typeface="IBM Plex Mono" pitchFamily="34" charset="-122"/>
                           <a:cs typeface="IBM Plex Mono" pitchFamily="34" charset="-120"/>
                         </a:rPr>
-                        <a:t>2</a:t>
+                        <a:t>1</a:t>
                       </a:r>
                       <a:endParaRPr lang="en-GB" sz="1050" dirty="0">
                         <a:latin typeface="IBM Plex Mono" charset="0"/>
@@ -6273,7 +6273,7 @@
                           <a:ea typeface="IBM Plex Mono" pitchFamily="34" charset="-122"/>
                           <a:cs typeface="IBM Plex Mono" pitchFamily="34" charset="-120"/>
                         </a:rPr>
-                        <a:t>5</a:t>
+                        <a:t>3</a:t>
                       </a:r>
                       <a:endParaRPr lang="en-GB" sz="1050" dirty="0">
                         <a:latin typeface="IBM Plex Mono" charset="0"/>
@@ -6535,7 +6535,7 @@
                           <a:ea typeface="IBM Plex Mono" pitchFamily="34" charset="-122"/>
                           <a:cs typeface="IBM Plex Mono" pitchFamily="34" charset="-120"/>
                         </a:rPr>
-                        <a:t>4</a:t>
+                        <a:t>6</a:t>
                       </a:r>
                       <a:endParaRPr lang="en-GB" sz="1050" dirty="0">
                         <a:latin typeface="IBM Plex Mono" charset="0"/>
@@ -6600,7 +6600,7 @@
                           <a:ea typeface="IBM Plex Mono" pitchFamily="34" charset="-122"/>
                           <a:cs typeface="IBM Plex Mono" pitchFamily="34" charset="-120"/>
                         </a:rPr>
-                        <a:t>1</a:t>
+                        <a:t>2</a:t>
                       </a:r>
                       <a:endParaRPr lang="en-GB" sz="1050" dirty="0">
                         <a:latin typeface="IBM Plex Mono" charset="0"/>
@@ -6665,7 +6665,7 @@
                           <a:ea typeface="IBM Plex Mono" pitchFamily="34" charset="-122"/>
                           <a:cs typeface="IBM Plex Mono" pitchFamily="34" charset="-120"/>
                         </a:rPr>
-                        <a:t>4</a:t>
+                        <a:t>6</a:t>
                       </a:r>
                       <a:endParaRPr lang="en-GB" sz="1050" dirty="0">
                         <a:latin typeface="IBM Plex Mono" charset="0"/>
@@ -7319,7 +7319,7 @@
                           <a:ea typeface="IBM Plex Mono" pitchFamily="34" charset="-122"/>
                           <a:cs typeface="IBM Plex Mono" pitchFamily="34" charset="-120"/>
                         </a:rPr>
-                        <a:t>1</a:t>
+                        <a:t>2</a:t>
                       </a:r>
                       <a:endParaRPr lang="en-GB" sz="1050" dirty="0">
                         <a:latin typeface="IBM Plex Mono" charset="0"/>
@@ -7449,7 +7449,7 @@
                           <a:ea typeface="IBM Plex Mono" pitchFamily="34" charset="-122"/>
                           <a:cs typeface="IBM Plex Mono" pitchFamily="34" charset="-120"/>
                         </a:rPr>
-                        <a:t>1</a:t>
+                        <a:t>2</a:t>
                       </a:r>
                       <a:endParaRPr lang="en-GB" sz="1050" dirty="0">
                         <a:latin typeface="IBM Plex Mono" charset="0"/>
@@ -7711,7 +7711,7 @@
                           <a:ea typeface="IBM Plex Mono" pitchFamily="34" charset="-122"/>
                           <a:cs typeface="IBM Plex Mono" pitchFamily="34" charset="-120"/>
                         </a:rPr>
-                        <a:t>50,000</a:t>
+                        <a:t>30,000</a:t>
                       </a:r>
                       <a:endParaRPr lang="en-GB" sz="1050" dirty="0">
                         <a:latin typeface="IBM Plex Mono" charset="0"/>
@@ -7776,7 +7776,7 @@
                           <a:ea typeface="IBM Plex Mono" pitchFamily="34" charset="-122"/>
                           <a:cs typeface="IBM Plex Mono" pitchFamily="34" charset="-120"/>
                         </a:rPr>
-                        <a:t>42,000</a:t>
+                        <a:t>18,500</a:t>
                       </a:r>
                       <a:endParaRPr lang="en-GB" sz="1050" dirty="0">
                         <a:latin typeface="IBM Plex Mono" charset="0"/>
@@ -7841,7 +7841,7 @@
                           <a:ea typeface="IBM Plex Mono" pitchFamily="34" charset="-122"/>
                           <a:cs typeface="IBM Plex Mono" pitchFamily="34" charset="-120"/>
                         </a:rPr>
-                        <a:t>42,000</a:t>
+                        <a:t>18,500</a:t>
                       </a:r>
                       <a:endParaRPr lang="en-GB" sz="1050" dirty="0">
                         <a:latin typeface="IBM Plex Mono" charset="0"/>
@@ -8103,7 +8103,7 @@
                           <a:ea typeface="IBM Plex Mono" pitchFamily="34" charset="-122"/>
                           <a:cs typeface="IBM Plex Mono" pitchFamily="34" charset="-120"/>
                         </a:rPr>
-                        <a:t>90</a:t>
+                        <a:t>85</a:t>
                       </a:r>
                       <a:endParaRPr lang="en-GB" sz="1050" dirty="0">
                         <a:latin typeface="IBM Plex Mono" charset="0"/>
@@ -9170,7 +9170,7 @@
                           <a:ea typeface="IBM Plex Mono" pitchFamily="34" charset="-122"/>
                           <a:cs typeface="IBM Plex Mono" pitchFamily="34" charset="-120"/>
                         </a:rPr>
-                        <a:t>3</a:t>
+                        <a:t>4</a:t>
                       </a:r>
                       <a:endParaRPr lang="en-GB" sz="1050" dirty="0">
                         <a:latin typeface="IBM Plex Mono" charset="0"/>
@@ -9562,7 +9562,7 @@
                           <a:ea typeface="IBM Plex Mono" pitchFamily="34" charset="-122"/>
                           <a:cs typeface="IBM Plex Mono" pitchFamily="34" charset="-120"/>
                         </a:rPr>
-                        <a:t>2</a:t>
+                        <a:t>3</a:t>
                       </a:r>
                       <a:endParaRPr lang="en-GB" sz="1050" dirty="0">
                         <a:latin typeface="IBM Plex Mono" charset="0"/>
@@ -9692,7 +9692,7 @@
                           <a:ea typeface="IBM Plex Mono" pitchFamily="34" charset="-122"/>
                           <a:cs typeface="IBM Plex Mono" pitchFamily="34" charset="-120"/>
                         </a:rPr>
-                        <a:t>1</a:t>
+                        <a:t>2</a:t>
                       </a:r>
                       <a:endParaRPr lang="en-GB" sz="1050" dirty="0">
                         <a:latin typeface="IBM Plex Mono" charset="0"/>
@@ -9954,7 +9954,7 @@
                           <a:ea typeface="IBM Plex Mono" pitchFamily="34" charset="-122"/>
                           <a:cs typeface="IBM Plex Mono" pitchFamily="34" charset="-120"/>
                         </a:rPr>
-                        <a:t>30</a:t>
+                        <a:t>25</a:t>
                       </a:r>
                       <a:endParaRPr lang="en-GB" sz="1050" dirty="0">
                         <a:latin typeface="IBM Plex Mono" charset="0"/>
@@ -10019,7 +10019,7 @@
                           <a:ea typeface="IBM Plex Mono" pitchFamily="34" charset="-122"/>
                           <a:cs typeface="IBM Plex Mono" pitchFamily="34" charset="-120"/>
                         </a:rPr>
-                        <a:t>32</a:t>
+                        <a:t>27</a:t>
                       </a:r>
                       <a:endParaRPr lang="en-GB" sz="1050" dirty="0">
                         <a:latin typeface="IBM Plex Mono" charset="0"/>
@@ -10084,7 +10084,7 @@
                           <a:ea typeface="IBM Plex Mono" pitchFamily="34" charset="-122"/>
                           <a:cs typeface="IBM Plex Mono" pitchFamily="34" charset="-120"/>
                         </a:rPr>
-                        <a:t>34</a:t>
+                        <a:t>29</a:t>
                       </a:r>
                       <a:endParaRPr lang="en-GB" sz="1050" dirty="0">
                         <a:latin typeface="IBM Plex Mono" charset="0"/>
@@ -10346,7 +10346,7 @@
                           <a:ea typeface="IBM Plex Mono" pitchFamily="34" charset="-122"/>
                           <a:cs typeface="IBM Plex Mono" pitchFamily="34" charset="-120"/>
                         </a:rPr>
-                        <a:t>5</a:t>
+                        <a:t>6</a:t>
                       </a:r>
                       <a:endParaRPr lang="en-GB" sz="1050" dirty="0">
                         <a:latin typeface="IBM Plex Mono" charset="0"/>
@@ -10411,7 +10411,7 @@
                           <a:ea typeface="IBM Plex Mono" pitchFamily="34" charset="-122"/>
                           <a:cs typeface="IBM Plex Mono" pitchFamily="34" charset="-120"/>
                         </a:rPr>
-                        <a:t>1</a:t>
+                        <a:t>2</a:t>
                       </a:r>
                       <a:endParaRPr lang="en-GB" sz="1050" dirty="0">
                         <a:latin typeface="IBM Plex Mono" charset="0"/>
@@ -10476,7 +10476,7 @@
                           <a:ea typeface="IBM Plex Mono" pitchFamily="34" charset="-122"/>
                           <a:cs typeface="IBM Plex Mono" pitchFamily="34" charset="-120"/>
                         </a:rPr>
-                        <a:t>3</a:t>
+                        <a:t>4</a:t>
                       </a:r>
                       <a:endParaRPr lang="en-GB" sz="1050" dirty="0">
                         <a:latin typeface="IBM Plex Mono" charset="0"/>
@@ -10915,7 +10915,7 @@
                           <a:ea typeface="IBM Plex Sans Arabic" pitchFamily="34" charset="-122"/>
                           <a:cs typeface="IBM Plex Sans Arabic" pitchFamily="34" charset="-120"/>
                         </a:rPr>
-                        <a:t>•  Signed a cooperation agreement with Sample Travel LLC giving a 5% discount on package prices.</a:t>
+                        <a:t>•  Signed a three-month pilot with Sample Travel LLC giving a 3% discount on made-up package prices.</a:t>
                       </a:r>
                       <a:endParaRPr lang="en-GB" sz="1100" dirty="0">
                         <a:latin typeface="IBM Plex Sans Arabic" charset="0"/>
@@ -10988,7 +10988,7 @@
                           <a:ea typeface="IBM Plex Sans Arabic" pitchFamily="34" charset="-122"/>
                           <a:cs typeface="IBM Plex Sans Arabic" pitchFamily="34" charset="-120"/>
                         </a:rPr>
-                        <a:t>•  Renewed the Test Co A contract (DK-P-0001) and raised its credit line to 50,000 SAR.</a:t>
+                        <a:t>•  Renewed the Test Co A test contract (DK-P-0001) and set its credit line to 20,000 SAR.</a:t>
                       </a:r>
                       <a:endParaRPr lang="en-GB" sz="1100" dirty="0">
                         <a:latin typeface="IBM Plex Sans Arabic" charset="0"/>
@@ -11061,7 +11061,7 @@
                           <a:ea typeface="IBM Plex Sans Arabic" pitchFamily="34" charset="-122"/>
                           <a:cs typeface="IBM Plex Sans Arabic" pitchFamily="34" charset="-120"/>
                         </a:rPr>
-                        <a:t>•  Madeup Airlines agreed to a fixed net fare for groups of 10 or more, reviewed on 14/08/2026.</a:t>
+                        <a:t>•  Madeup Airlines agreed to a fixed test fare for groups of 8 or more, reviewed on 12/07/2026.</a:t>
                       </a:r>
                       <a:endParaRPr lang="en-GB" sz="1100" dirty="0">
                         <a:latin typeface="IBM Plex Sans Arabic" charset="0"/>
@@ -11180,7 +11180,7 @@
                           <a:ea typeface="IBM Plex Sans Arabic" pitchFamily="34" charset="-122"/>
                           <a:cs typeface="IBM Plex Sans Arabic" pitchFamily="34" charset="-120"/>
                         </a:rPr>
-                        <a:t>•  Invoice INV-T-0001 for Test Co A was paid in full; bookings rose from 1,200 to 3,450 in Q1–Q2, up 187.5%.</a:t>
+                        <a:t>•  Invoice INV-T-0001 for Test Co A was paid in full; requests rose from 240 to 310 in Q1–Q2, up 29.2%.</a:t>
                       </a:r>
                       <a:endParaRPr lang="en-GB" sz="1100" dirty="0">
                         <a:latin typeface="IBM Plex Sans Arabic" charset="0"/>
@@ -11221,7 +11221,7 @@
                           <a:ea typeface="IBM Plex Mono" pitchFamily="34" charset="-122"/>
                           <a:cs typeface="IBM Plex Mono" pitchFamily="34" charset="-120"/>
                         </a:rPr>
-                        <a:t>11,500 SAR</a:t>
+                        <a:t>7,250 SAR</a:t>
                       </a:r>
                       <a:endParaRPr lang="en-GB" sz="1200" dirty="0"/>
                     </a:p>
@@ -11260,7 +11260,7 @@
                           <a:ea typeface="IBM Plex Sans Arabic" pitchFamily="34" charset="-122"/>
                           <a:cs typeface="IBM Plex Sans Arabic" pitchFamily="34" charset="-120"/>
                         </a:rPr>
-                        <a:t>•  Received a commission from Fake Institute for 2025, recorded under DPIN-T-0001.</a:t>
+                        <a:t>•  Recorded a made-up referral fee from Sample Holding under DPIN-T-0001.</a:t>
                       </a:r>
                       <a:endParaRPr lang="en-GB" sz="1100" dirty="0">
                         <a:latin typeface="IBM Plex Sans Arabic" charset="0"/>
@@ -11301,7 +11301,7 @@
                           <a:ea typeface="IBM Plex Mono" pitchFamily="34" charset="-122"/>
                           <a:cs typeface="IBM Plex Mono" pitchFamily="34" charset="-120"/>
                         </a:rPr>
-                        <a:t>26,231 SAR</a:t>
+                        <a:t>3,140 SAR</a:t>
                       </a:r>
                       <a:endParaRPr lang="en-GB" sz="1200" dirty="0"/>
                     </a:p>
@@ -11386,7 +11386,7 @@
                           <a:ea typeface="IBM Plex Sans Arabic" pitchFamily="34" charset="-122"/>
                           <a:cs typeface="IBM Plex Sans Arabic" pitchFamily="34" charset="-120"/>
                         </a:rPr>
-                        <a:t>•  Resolved late ticket delivery for Madeup Airlines bookings: exposure 50,000, actual loss -8,000 avoided.</a:t>
+                        <a:t>•  Fixed duplicate confirmations on Madeup Airlines test bookings: exposure 20,000, actual loss -1,500 avoided.</a:t>
                       </a:r>
                       <a:endParaRPr lang="en-GB" sz="1100" dirty="0">
                         <a:latin typeface="IBM Plex Sans Arabic" charset="0"/>
@@ -11427,7 +11427,7 @@
                           <a:ea typeface="IBM Plex Mono" pitchFamily="34" charset="-122"/>
                           <a:cs typeface="IBM Plex Mono" pitchFamily="34" charset="-120"/>
                         </a:rPr>
-                        <a:t>42,000 SAR</a:t>
+                        <a:t>18,500 SAR</a:t>
                       </a:r>
                       <a:endParaRPr lang="en-GB" sz="1200" dirty="0"/>
                     </a:p>
@@ -11483,7 +11483,7 @@
                           <a:ea typeface="IBM Plex Sans Arabic" pitchFamily="34" charset="-122"/>
                           <a:cs typeface="IBM Plex Sans Arabic" pitchFamily="34" charset="-120"/>
                         </a:rPr>
-                        <a:t>•  Arabic digits typed by a person print as Latin digits: 3 contracts, 12.5% saving.</a:t>
+                        <a:t>•  Arabic digits typed by a person print as Latin digits: 4 contracts, 7.5% saving.</a:t>
                       </a:r>
                       <a:endParaRPr lang="en-GB" sz="1100" dirty="0">
                         <a:latin typeface="IBM Plex Sans Arabic" charset="0"/>
@@ -11817,7 +11817,7 @@
                           <a:ea typeface="IBM Plex Sans Arabic" pitchFamily="34" charset="-122"/>
                           <a:cs typeface="IBM Plex Sans Arabic" pitchFamily="34" charset="-120"/>
                         </a:rPr>
-                        <a:t>•  No reply yet from Fake University on the renewal, open since 3 August 2026 (57 days).</a:t>
+                        <a:t>•  No reply yet from Test Co D on the pilot, open since 10 August 2026 (50 days).</a:t>
                       </a:r>
                       <a:endParaRPr lang="en-GB" sz="1100" dirty="0">
                         <a:latin typeface="IBM Plex Sans Arabic" charset="0"/>
@@ -11890,7 +11890,7 @@
                           <a:ea typeface="IBM Plex Sans Arabic" pitchFamily="34" charset="-122"/>
                           <a:cs typeface="IBM Plex Sans Arabic" pitchFamily="34" charset="-120"/>
                         </a:rPr>
-                        <a:t>•  Payment through the Sample Pay gateway is still pending the provider’s review.</a:t>
+                        <a:t>•  The shared calendar sync with Sample Pay is still waiting for the provider’s review.</a:t>
                       </a:r>
                       <a:endParaRPr lang="en-GB" sz="1100" dirty="0">
                         <a:latin typeface="IBM Plex Sans Arabic" charset="0"/>
@@ -11963,7 +11963,7 @@
                           <a:ea typeface="IBM Plex Sans Arabic" pitchFamily="34" charset="-122"/>
                           <a:cs typeface="IBM Plex Sans Arabic" pitchFamily="34" charset="-120"/>
                         </a:rPr>
-                        <a:t>•  تأخر رد السفارة على طلب التأشيرة لمجموعة الطلاب (المرجع T-0042).</a:t>
+                        <a:t>•  لم يؤكد العميل التجريبي موعد الاجتماع بعد (المرجع T-0042).</a:t>
                       </a:r>
                       <a:endParaRPr lang="ar-SA" sz="1100" dirty="0">
                         <a:latin typeface="IBM Plex Sans Arabic" charset="0"/>
@@ -12297,7 +12297,7 @@
                           <a:ea typeface="IBM Plex Sans Arabic" pitchFamily="34" charset="-122"/>
                           <a:cs typeface="IBM Plex Sans Arabic" pitchFamily="34" charset="-120"/>
                         </a:rPr>
-                        <a:t>•  Receive the commission from Sample Travel LLC.</a:t>
+                        <a:t>•  Follow up the pilot results with Sample Travel LLC.</a:t>
                       </a:r>
                       <a:endParaRPr lang="en-GB" sz="1100" dirty="0">
                         <a:latin typeface="IBM Plex Sans Arabic" charset="0"/>
@@ -12370,7 +12370,7 @@
                           <a:ea typeface="IBM Plex Sans Arabic" pitchFamily="34" charset="-122"/>
                           <a:cs typeface="IBM Plex Sans Arabic" pitchFamily="34" charset="-120"/>
                         </a:rPr>
-                        <a:t>•  Meet the five largest airlines to agree 2027 targets and discount codes.</a:t>
+                        <a:t>•  Hold two partner visits and send the made-up price list for the next quarter.</a:t>
                       </a:r>
                       <a:endParaRPr lang="en-GB" sz="1100" dirty="0">
                         <a:latin typeface="IBM Plex Sans Arabic" charset="0"/>
